--- a/generated/Tier 1 Broker Scorecards/Roadways Commercial Insurance Services Inc_Broker_Scorecard.pptx
+++ b/generated/Tier 1 Broker Scorecards/Roadways Commercial Insurance Services Inc_Broker_Scorecard.pptx
@@ -3357,7 +3357,7 @@
                         <a:rPr sz="800">
                           <a:latin typeface="Segoe UI"/>
                         </a:rPr>
-                        <a:t>$737,615.70 / $1,794,106.57 / $1,042,624.14</a:t>
+                        <a:t>$737,615.70 / $1,789,071.26 / $1,037,588.83</a:t>
                       </a:r>
                     </a:p>
                   </a:txBody>
@@ -3394,7 +3394,7 @@
                         <a:rPr sz="900">
                           <a:latin typeface="Segoe UI"/>
                         </a:rPr>
-                        <a:t>Tier 1  |  14.96% / 15.00%</a:t>
+                        <a:t>Tier 1  |  14.84% / 15.00%</a:t>
                       </a:r>
                     </a:p>
                   </a:txBody>
@@ -3431,7 +3431,7 @@
                         <a:rPr sz="900">
                           <a:latin typeface="Segoe UI"/>
                         </a:rPr>
-                        <a:t>$1,032,661.98  (101.0% achieved)</a:t>
+                        <a:t>$1,032,661.98  (100.5% achieved)</a:t>
                       </a:r>
                     </a:p>
                   </a:txBody>
@@ -3690,7 +3690,7 @@
                         <a:rPr sz="900">
                           <a:latin typeface="Segoe UI"/>
                         </a:rPr>
-                        <a:t>Fleet Bound Premium: $452,668.77</a:t>
+                        <a:t>Fleet Bound Premium: $466,586.16</a:t>
                       </a:r>
                     </a:p>
                   </a:txBody>
@@ -3727,7 +3727,7 @@
                         <a:rPr sz="900">
                           <a:latin typeface="Segoe UI"/>
                         </a:rPr>
-                        <a:t>Fleet Book %: 43.4%</a:t>
+                        <a:t>Fleet Book %: 45.0%</a:t>
                       </a:r>
                     </a:p>
                   </a:txBody>
@@ -3766,7 +3766,7 @@
                         <a:rPr sz="900">
                           <a:latin typeface="Segoe UI"/>
                         </a:rPr>
-                        <a:t>Non-Fleet Subs: 111  |  Binds: 16</a:t>
+                        <a:t>Non-Fleet Subs: 112  |  Binds: 16</a:t>
                       </a:r>
                     </a:p>
                   </a:txBody>
@@ -3803,7 +3803,7 @@
                         <a:rPr sz="900">
                           <a:latin typeface="Segoe UI"/>
                         </a:rPr>
-                        <a:t>Non-Fleet Bound Premium: $589,955.37</a:t>
+                        <a:t>Non-Fleet Bound Premium: $571,002.67</a:t>
                       </a:r>
                     </a:p>
                   </a:txBody>
@@ -3840,7 +3840,7 @@
                         <a:rPr sz="900">
                           <a:latin typeface="Segoe UI"/>
                         </a:rPr>
-                        <a:t>Non-Fleet Book %: 56.6%</a:t>
+                        <a:t>Non-Fleet Book %: 55.0%</a:t>
                       </a:r>
                     </a:p>
                   </a:txBody>
@@ -4423,12 +4423,9 @@
                       <a:pPr algn="ctr"/>
                       <a:r>
                         <a:rPr sz="800">
-                          <a:solidFill>
-                            <a:srgbClr val="DC2626"/>
-                          </a:solidFill>
                           <a:latin typeface="Segoe UI"/>
                         </a:rPr>
-                        <a:t>22</a:t>
+                        <a:t>24</a:t>
                       </a:r>
                     </a:p>
                   </a:txBody>
@@ -4707,7 +4704,7 @@
                           </a:solidFill>
                           <a:latin typeface="Segoe UI"/>
                         </a:rPr>
-                        <a:t>13.6%</a:t>
+                        <a:t>16.7%</a:t>
                       </a:r>
                     </a:p>
                   </a:txBody>
@@ -4983,7 +4980,7 @@
                           </a:solidFill>
                           <a:latin typeface="Segoe UI"/>
                         </a:rPr>
-                        <a:t>3</a:t>
+                        <a:t>4</a:t>
                       </a:r>
                     </a:p>
                   </a:txBody>
@@ -5262,7 +5259,7 @@
                           </a:solidFill>
                           <a:latin typeface="Segoe UI"/>
                         </a:rPr>
-                        <a:t>$106.8K</a:t>
+                        <a:t>$101.7K</a:t>
                       </a:r>
                     </a:p>
                   </a:txBody>

--- a/generated/Tier 1 Broker Scorecards/Roadways Commercial Insurance Services Inc_Broker_Scorecard.pptx
+++ b/generated/Tier 1 Broker Scorecards/Roadways Commercial Insurance Services Inc_Broker_Scorecard.pptx
@@ -3394,7 +3394,7 @@
                         <a:rPr sz="900">
                           <a:latin typeface="Segoe UI"/>
                         </a:rPr>
-                        <a:t>Tier 1  |  14.84% / 15.00%</a:t>
+                        <a:t>Tier 1  |  14.50% / 15.00%</a:t>
                       </a:r>
                     </a:p>
                   </a:txBody>
@@ -3653,7 +3653,7 @@
                         <a:rPr sz="900">
                           <a:latin typeface="Segoe UI"/>
                         </a:rPr>
-                        <a:t>Fleet Subs: 16  |  Binds: 3</a:t>
+                        <a:t>Fleet Subs: 16  |  Binds: 4</a:t>
                       </a:r>
                     </a:p>
                   </a:txBody>
@@ -3690,7 +3690,7 @@
                         <a:rPr sz="900">
                           <a:latin typeface="Segoe UI"/>
                         </a:rPr>
-                        <a:t>Fleet Bound Premium: $466,586.16</a:t>
+                        <a:t>Fleet Bound Premium: $541,762.49</a:t>
                       </a:r>
                     </a:p>
                   </a:txBody>
@@ -3727,7 +3727,7 @@
                         <a:rPr sz="900">
                           <a:latin typeface="Segoe UI"/>
                         </a:rPr>
-                        <a:t>Fleet Book %: 45.0%</a:t>
+                        <a:t>Fleet Book %: 52.2%</a:t>
                       </a:r>
                     </a:p>
                   </a:txBody>
@@ -3766,7 +3766,7 @@
                         <a:rPr sz="900">
                           <a:latin typeface="Segoe UI"/>
                         </a:rPr>
-                        <a:t>Non-Fleet Subs: 112  |  Binds: 16</a:t>
+                        <a:t>Non-Fleet Subs: 115  |  Binds: 15</a:t>
                       </a:r>
                     </a:p>
                   </a:txBody>
@@ -3803,7 +3803,7 @@
                         <a:rPr sz="900">
                           <a:latin typeface="Segoe UI"/>
                         </a:rPr>
-                        <a:t>Non-Fleet Bound Premium: $571,002.67</a:t>
+                        <a:t>Non-Fleet Bound Premium: $495,826.34</a:t>
                       </a:r>
                     </a:p>
                   </a:txBody>
@@ -3840,7 +3840,7 @@
                         <a:rPr sz="900">
                           <a:latin typeface="Segoe UI"/>
                         </a:rPr>
-                        <a:t>Non-Fleet Book %: 55.0%</a:t>
+                        <a:t>Non-Fleet Book %: 47.8%</a:t>
                       </a:r>
                     </a:p>
                   </a:txBody>
@@ -4423,9 +4423,12 @@
                       <a:pPr algn="ctr"/>
                       <a:r>
                         <a:rPr sz="800">
+                          <a:solidFill>
+                            <a:srgbClr val="059669"/>
+                          </a:solidFill>
                           <a:latin typeface="Segoe UI"/>
                         </a:rPr>
-                        <a:t>24</a:t>
+                        <a:t>28</a:t>
                       </a:r>
                     </a:p>
                   </a:txBody>
@@ -4578,7 +4581,7 @@
                         <a:rPr sz="800">
                           <a:latin typeface="Segoe UI"/>
                         </a:rPr>
-                        <a:t>16.7%</a:t>
+                        <a:t>19.0%</a:t>
                       </a:r>
                     </a:p>
                   </a:txBody>
@@ -4704,7 +4707,7 @@
                           </a:solidFill>
                           <a:latin typeface="Segoe UI"/>
                         </a:rPr>
-                        <a:t>16.7%</a:t>
+                        <a:t>14.3%</a:t>
                       </a:r>
                     </a:p>
                   </a:txBody>
@@ -4863,7 +4866,7 @@
                         <a:rPr sz="800">
                           <a:latin typeface="Segoe UI"/>
                         </a:rPr>
-                        <a:t>7</a:t>
+                        <a:t>8</a:t>
                       </a:r>
                     </a:p>
                   </a:txBody>

--- a/generated/Tier 1 Broker Scorecards/Roadways Commercial Insurance Services Inc_Broker_Scorecard.pptx
+++ b/generated/Tier 1 Broker Scorecards/Roadways Commercial Insurance Services Inc_Broker_Scorecard.pptx
@@ -4428,7 +4428,7 @@
                           </a:solidFill>
                           <a:latin typeface="Segoe UI"/>
                         </a:rPr>
-                        <a:t>28</a:t>
+                        <a:t>29</a:t>
                       </a:r>
                     </a:p>
                   </a:txBody>
@@ -4707,7 +4707,7 @@
                           </a:solidFill>
                           <a:latin typeface="Segoe UI"/>
                         </a:rPr>
-                        <a:t>14.3%</a:t>
+                        <a:t>13.8%</a:t>
                       </a:r>
                     </a:p>
                   </a:txBody>

--- a/generated/Tier 1 Broker Scorecards/Roadways Commercial Insurance Services Inc_Broker_Scorecard.pptx
+++ b/generated/Tier 1 Broker Scorecards/Roadways Commercial Insurance Services Inc_Broker_Scorecard.pptx
@@ -3357,7 +3357,7 @@
                         <a:rPr sz="800">
                           <a:latin typeface="Segoe UI"/>
                         </a:rPr>
-                        <a:t>$737,615.70 / $1,789,071.26 / $1,037,588.83</a:t>
+                        <a:t>$737,615.70 / $1,787,577.29 / $1,036,094.86</a:t>
                       </a:r>
                     </a:p>
                   </a:txBody>
@@ -3394,7 +3394,7 @@
                         <a:rPr sz="900">
                           <a:latin typeface="Segoe UI"/>
                         </a:rPr>
-                        <a:t>Tier 1  |  14.50% / 15.00%</a:t>
+                        <a:t>Tier 1  |  15.27% / 15.00%</a:t>
                       </a:r>
                     </a:p>
                   </a:txBody>
@@ -3431,7 +3431,7 @@
                         <a:rPr sz="900">
                           <a:latin typeface="Segoe UI"/>
                         </a:rPr>
-                        <a:t>$1,032,661.98  (100.5% achieved)</a:t>
+                        <a:t>$1,032,661.98  (100.3% achieved)</a:t>
                       </a:r>
                     </a:p>
                   </a:txBody>
@@ -3653,7 +3653,7 @@
                         <a:rPr sz="900">
                           <a:latin typeface="Segoe UI"/>
                         </a:rPr>
-                        <a:t>Fleet Subs: 16  |  Binds: 4</a:t>
+                        <a:t>Fleet Subs: 16  |  Binds: 5</a:t>
                       </a:r>
                     </a:p>
                   </a:txBody>
@@ -3690,7 +3690,7 @@
                         <a:rPr sz="900">
                           <a:latin typeface="Segoe UI"/>
                         </a:rPr>
-                        <a:t>Fleet Bound Premium: $541,762.49</a:t>
+                        <a:t>Fleet Bound Premium: $581,043.58</a:t>
                       </a:r>
                     </a:p>
                   </a:txBody>
@@ -3727,7 +3727,7 @@
                         <a:rPr sz="900">
                           <a:latin typeface="Segoe UI"/>
                         </a:rPr>
-                        <a:t>Fleet Book %: 52.2%</a:t>
+                        <a:t>Fleet Book %: 56.1%</a:t>
                       </a:r>
                     </a:p>
                   </a:txBody>
@@ -3803,7 +3803,7 @@
                         <a:rPr sz="900">
                           <a:latin typeface="Segoe UI"/>
                         </a:rPr>
-                        <a:t>Non-Fleet Bound Premium: $495,826.34</a:t>
+                        <a:t>Non-Fleet Bound Premium: $455,051.28</a:t>
                       </a:r>
                     </a:p>
                   </a:txBody>
@@ -3840,7 +3840,7 @@
                         <a:rPr sz="900">
                           <a:latin typeface="Segoe UI"/>
                         </a:rPr>
-                        <a:t>Non-Fleet Book %: 47.8%</a:t>
+                        <a:t>Non-Fleet Book %: 43.9%</a:t>
                       </a:r>
                     </a:p>
                   </a:txBody>
@@ -4707,7 +4707,7 @@
                           </a:solidFill>
                           <a:latin typeface="Segoe UI"/>
                         </a:rPr>
-                        <a:t>13.8%</a:t>
+                        <a:t>17.2%</a:t>
                       </a:r>
                     </a:p>
                   </a:txBody>
@@ -4983,7 +4983,7 @@
                           </a:solidFill>
                           <a:latin typeface="Segoe UI"/>
                         </a:rPr>
-                        <a:t>4</a:t>
+                        <a:t>5</a:t>
                       </a:r>
                     </a:p>
                   </a:txBody>
@@ -5262,7 +5262,7 @@
                           </a:solidFill>
                           <a:latin typeface="Segoe UI"/>
                         </a:rPr>
-                        <a:t>$101.7K</a:t>
+                        <a:t>$100.3K</a:t>
                       </a:r>
                     </a:p>
                   </a:txBody>

--- a/generated/Tier 1 Broker Scorecards/Roadways Commercial Insurance Services Inc_Broker_Scorecard.pptx
+++ b/generated/Tier 1 Broker Scorecards/Roadways Commercial Insurance Services Inc_Broker_Scorecard.pptx
@@ -3394,7 +3394,7 @@
                         <a:rPr sz="900">
                           <a:latin typeface="Segoe UI"/>
                         </a:rPr>
-                        <a:t>Tier 1  |  15.27% / 15.00%</a:t>
+                        <a:t>Tier 1  |  15.04% / 15.00%</a:t>
                       </a:r>
                     </a:p>
                   </a:txBody>
@@ -3653,7 +3653,7 @@
                         <a:rPr sz="900">
                           <a:latin typeface="Segoe UI"/>
                         </a:rPr>
-                        <a:t>Fleet Subs: 16  |  Binds: 5</a:t>
+                        <a:t>Fleet Subs: 17  |  Binds: 5</a:t>
                       </a:r>
                     </a:p>
                   </a:txBody>
@@ -3766,7 +3766,7 @@
                         <a:rPr sz="900">
                           <a:latin typeface="Segoe UI"/>
                         </a:rPr>
-                        <a:t>Non-Fleet Subs: 115  |  Binds: 15</a:t>
+                        <a:t>Non-Fleet Subs: 116  |  Binds: 15</a:t>
                       </a:r>
                     </a:p>
                   </a:txBody>
@@ -4428,7 +4428,7 @@
                           </a:solidFill>
                           <a:latin typeface="Segoe UI"/>
                         </a:rPr>
-                        <a:t>29</a:t>
+                        <a:t>31</a:t>
                       </a:r>
                     </a:p>
                   </a:txBody>
@@ -4707,7 +4707,7 @@
                           </a:solidFill>
                           <a:latin typeface="Segoe UI"/>
                         </a:rPr>
-                        <a:t>17.2%</a:t>
+                        <a:t>16.1%</a:t>
                       </a:r>
                     </a:p>
                   </a:txBody>

--- a/generated/Tier 1 Broker Scorecards/Roadways Commercial Insurance Services Inc_Broker_Scorecard.pptx
+++ b/generated/Tier 1 Broker Scorecards/Roadways Commercial Insurance Services Inc_Broker_Scorecard.pptx
@@ -3394,7 +3394,7 @@
                         <a:rPr sz="900">
                           <a:latin typeface="Segoe UI"/>
                         </a:rPr>
-                        <a:t>Tier 1  |  15.04% / 15.00%</a:t>
+                        <a:t>Tier 1  |  14.93% / 15.00%</a:t>
                       </a:r>
                     </a:p>
                   </a:txBody>
@@ -3766,7 +3766,7 @@
                         <a:rPr sz="900">
                           <a:latin typeface="Segoe UI"/>
                         </a:rPr>
-                        <a:t>Non-Fleet Subs: 116  |  Binds: 15</a:t>
+                        <a:t>Non-Fleet Subs: 117  |  Binds: 15</a:t>
                       </a:r>
                     </a:p>
                   </a:txBody>
@@ -4428,7 +4428,7 @@
                           </a:solidFill>
                           <a:latin typeface="Segoe UI"/>
                         </a:rPr>
-                        <a:t>31</a:t>
+                        <a:t>32</a:t>
                       </a:r>
                     </a:p>
                   </a:txBody>
@@ -4707,7 +4707,7 @@
                           </a:solidFill>
                           <a:latin typeface="Segoe UI"/>
                         </a:rPr>
-                        <a:t>16.1%</a:t>
+                        <a:t>15.6%</a:t>
                       </a:r>
                     </a:p>
                   </a:txBody>

--- a/generated/Tier 1 Broker Scorecards/Roadways Commercial Insurance Services Inc_Broker_Scorecard.pptx
+++ b/generated/Tier 1 Broker Scorecards/Roadways Commercial Insurance Services Inc_Broker_Scorecard.pptx
@@ -4581,7 +4581,7 @@
                         <a:rPr sz="800">
                           <a:latin typeface="Segoe UI"/>
                         </a:rPr>
-                        <a:t>19.0%</a:t>
+                        <a:t>16.7%</a:t>
                       </a:r>
                     </a:p>
                   </a:txBody>
@@ -4866,7 +4866,7 @@
                         <a:rPr sz="800">
                           <a:latin typeface="Segoe UI"/>
                         </a:rPr>
-                        <a:t>8</a:t>
+                        <a:t>7</a:t>
                       </a:r>
                     </a:p>
                   </a:txBody>

--- a/generated/Tier 1 Broker Scorecards/Roadways Commercial Insurance Services Inc_Broker_Scorecard.pptx
+++ b/generated/Tier 1 Broker Scorecards/Roadways Commercial Insurance Services Inc_Broker_Scorecard.pptx
@@ -3357,7 +3357,7 @@
                         <a:rPr sz="800">
                           <a:latin typeface="Segoe UI"/>
                         </a:rPr>
-                        <a:t>$737,615.70 / $1,787,577.29 / $1,036,094.86</a:t>
+                        <a:t>$737,615.70 / $1,844,706.39 / $1,093,223.96</a:t>
                       </a:r>
                     </a:p>
                   </a:txBody>
@@ -3394,7 +3394,7 @@
                         <a:rPr sz="900">
                           <a:latin typeface="Segoe UI"/>
                         </a:rPr>
-                        <a:t>Tier 1  |  14.93% / 15.00%</a:t>
+                        <a:t>Tier 1  |  15.44% / 15.00%</a:t>
                       </a:r>
                     </a:p>
                   </a:txBody>
@@ -3431,7 +3431,7 @@
                         <a:rPr sz="900">
                           <a:latin typeface="Segoe UI"/>
                         </a:rPr>
-                        <a:t>$1,032,661.98  (100.3% achieved)</a:t>
+                        <a:t>$1,032,661.98  (105.9% achieved)</a:t>
                       </a:r>
                     </a:p>
                   </a:txBody>
@@ -3653,7 +3653,7 @@
                         <a:rPr sz="900">
                           <a:latin typeface="Segoe UI"/>
                         </a:rPr>
-                        <a:t>Fleet Subs: 17  |  Binds: 5</a:t>
+                        <a:t>Fleet Subs: 18  |  Binds: 5</a:t>
                       </a:r>
                     </a:p>
                   </a:txBody>
@@ -3690,7 +3690,7 @@
                         <a:rPr sz="900">
                           <a:latin typeface="Segoe UI"/>
                         </a:rPr>
-                        <a:t>Fleet Bound Premium: $581,043.58</a:t>
+                        <a:t>Fleet Bound Premium: $576,631.38</a:t>
                       </a:r>
                     </a:p>
                   </a:txBody>
@@ -3727,7 +3727,7 @@
                         <a:rPr sz="900">
                           <a:latin typeface="Segoe UI"/>
                         </a:rPr>
-                        <a:t>Fleet Book %: 56.1%</a:t>
+                        <a:t>Fleet Book %: 52.7%</a:t>
                       </a:r>
                     </a:p>
                   </a:txBody>
@@ -3766,7 +3766,7 @@
                         <a:rPr sz="900">
                           <a:latin typeface="Segoe UI"/>
                         </a:rPr>
-                        <a:t>Non-Fleet Subs: 117  |  Binds: 15</a:t>
+                        <a:t>Non-Fleet Subs: 118  |  Binds: 16</a:t>
                       </a:r>
                     </a:p>
                   </a:txBody>
@@ -3803,7 +3803,7 @@
                         <a:rPr sz="900">
                           <a:latin typeface="Segoe UI"/>
                         </a:rPr>
-                        <a:t>Non-Fleet Bound Premium: $455,051.28</a:t>
+                        <a:t>Non-Fleet Bound Premium: $516,592.58</a:t>
                       </a:r>
                     </a:p>
                   </a:txBody>
@@ -3840,7 +3840,7 @@
                         <a:rPr sz="900">
                           <a:latin typeface="Segoe UI"/>
                         </a:rPr>
-                        <a:t>Non-Fleet Book %: 43.9%</a:t>
+                        <a:t>Non-Fleet Book %: 47.3%</a:t>
                       </a:r>
                     </a:p>
                   </a:txBody>
@@ -4428,7 +4428,7 @@
                           </a:solidFill>
                           <a:latin typeface="Segoe UI"/>
                         </a:rPr>
-                        <a:t>32</a:t>
+                        <a:t>34</a:t>
                       </a:r>
                     </a:p>
                   </a:txBody>
@@ -4581,7 +4581,7 @@
                         <a:rPr sz="800">
                           <a:latin typeface="Segoe UI"/>
                         </a:rPr>
-                        <a:t>16.7%</a:t>
+                        <a:t>19.0%</a:t>
                       </a:r>
                     </a:p>
                   </a:txBody>
@@ -4707,7 +4707,7 @@
                           </a:solidFill>
                           <a:latin typeface="Segoe UI"/>
                         </a:rPr>
-                        <a:t>15.6%</a:t>
+                        <a:t>17.6%</a:t>
                       </a:r>
                     </a:p>
                   </a:txBody>
@@ -4866,7 +4866,7 @@
                         <a:rPr sz="800">
                           <a:latin typeface="Segoe UI"/>
                         </a:rPr>
-                        <a:t>7</a:t>
+                        <a:t>8</a:t>
                       </a:r>
                     </a:p>
                   </a:txBody>
@@ -4983,7 +4983,7 @@
                           </a:solidFill>
                           <a:latin typeface="Segoe UI"/>
                         </a:rPr>
-                        <a:t>5</a:t>
+                        <a:t>6</a:t>
                       </a:r>
                     </a:p>
                   </a:txBody>
@@ -5262,7 +5262,7 @@
                           </a:solidFill>
                           <a:latin typeface="Segoe UI"/>
                         </a:rPr>
-                        <a:t>$100.3K</a:t>
+                        <a:t>$157.4K</a:t>
                       </a:r>
                     </a:p>
                   </a:txBody>

--- a/generated/Tier 1 Broker Scorecards/Roadways Commercial Insurance Services Inc_Broker_Scorecard.pptx
+++ b/generated/Tier 1 Broker Scorecards/Roadways Commercial Insurance Services Inc_Broker_Scorecard.pptx
@@ -3357,7 +3357,7 @@
                         <a:rPr sz="800">
                           <a:latin typeface="Segoe UI"/>
                         </a:rPr>
-                        <a:t>$737,615.70 / $1,844,706.39 / $1,093,223.96</a:t>
+                        <a:t>$737,615.70 / $1,828,168.12 / $1,076,685.69</a:t>
                       </a:r>
                     </a:p>
                   </a:txBody>
@@ -3394,7 +3394,7 @@
                         <a:rPr sz="900">
                           <a:latin typeface="Segoe UI"/>
                         </a:rPr>
-                        <a:t>Tier 1  |  15.44% / 15.00%</a:t>
+                        <a:t>Tier 1  |  14.71% / 15.00%</a:t>
                       </a:r>
                     </a:p>
                   </a:txBody>
@@ -3431,7 +3431,7 @@
                         <a:rPr sz="900">
                           <a:latin typeface="Segoe UI"/>
                         </a:rPr>
-                        <a:t>$1,032,661.98  (105.9% achieved)</a:t>
+                        <a:t>$1,032,661.98  (104.3% achieved)</a:t>
                       </a:r>
                     </a:p>
                   </a:txBody>
@@ -3690,7 +3690,7 @@
                         <a:rPr sz="900">
                           <a:latin typeface="Segoe UI"/>
                         </a:rPr>
-                        <a:t>Fleet Bound Premium: $576,631.38</a:t>
+                        <a:t>Fleet Bound Premium: $598,533.06</a:t>
                       </a:r>
                     </a:p>
                   </a:txBody>
@@ -3727,7 +3727,7 @@
                         <a:rPr sz="900">
                           <a:latin typeface="Segoe UI"/>
                         </a:rPr>
-                        <a:t>Fleet Book %: 52.7%</a:t>
+                        <a:t>Fleet Book %: 55.6%</a:t>
                       </a:r>
                     </a:p>
                   </a:txBody>
@@ -3766,7 +3766,7 @@
                         <a:rPr sz="900">
                           <a:latin typeface="Segoe UI"/>
                         </a:rPr>
-                        <a:t>Non-Fleet Subs: 118  |  Binds: 16</a:t>
+                        <a:t>Non-Fleet Subs: 118  |  Binds: 15</a:t>
                       </a:r>
                     </a:p>
                   </a:txBody>
@@ -3803,7 +3803,7 @@
                         <a:rPr sz="900">
                           <a:latin typeface="Segoe UI"/>
                         </a:rPr>
-                        <a:t>Non-Fleet Bound Premium: $516,592.58</a:t>
+                        <a:t>Non-Fleet Bound Premium: $478,152.63</a:t>
                       </a:r>
                     </a:p>
                   </a:txBody>
@@ -3840,7 +3840,7 @@
                         <a:rPr sz="900">
                           <a:latin typeface="Segoe UI"/>
                         </a:rPr>
-                        <a:t>Non-Fleet Book %: 47.3%</a:t>
+                        <a:t>Non-Fleet Book %: 44.4%</a:t>
                       </a:r>
                     </a:p>
                   </a:txBody>
@@ -4428,7 +4428,7 @@
                           </a:solidFill>
                           <a:latin typeface="Segoe UI"/>
                         </a:rPr>
-                        <a:t>34</a:t>
+                        <a:t>35</a:t>
                       </a:r>
                     </a:p>
                   </a:txBody>
@@ -4707,7 +4707,7 @@
                           </a:solidFill>
                           <a:latin typeface="Segoe UI"/>
                         </a:rPr>
-                        <a:t>17.6%</a:t>
+                        <a:t>17.1%</a:t>
                       </a:r>
                     </a:p>
                   </a:txBody>
@@ -5262,7 +5262,7 @@
                           </a:solidFill>
                           <a:latin typeface="Segoe UI"/>
                         </a:rPr>
-                        <a:t>$157.4K</a:t>
+                        <a:t>$140.8K</a:t>
                       </a:r>
                     </a:p>
                   </a:txBody>

--- a/generated/Tier 1 Broker Scorecards/Roadways Commercial Insurance Services Inc_Broker_Scorecard.pptx
+++ b/generated/Tier 1 Broker Scorecards/Roadways Commercial Insurance Services Inc_Broker_Scorecard.pptx
@@ -3394,7 +3394,7 @@
                         <a:rPr sz="900">
                           <a:latin typeface="Segoe UI"/>
                         </a:rPr>
-                        <a:t>Tier 1  |  14.71% / 15.00%</a:t>
+                        <a:t>Tier 1  |  13.87% / 15.00%</a:t>
                       </a:r>
                     </a:p>
                   </a:txBody>
@@ -3653,7 +3653,7 @@
                         <a:rPr sz="900">
                           <a:latin typeface="Segoe UI"/>
                         </a:rPr>
-                        <a:t>Fleet Subs: 18  |  Binds: 5</a:t>
+                        <a:t>Fleet Subs: 19  |  Binds: 5</a:t>
                       </a:r>
                     </a:p>
                   </a:txBody>
@@ -3690,7 +3690,7 @@
                         <a:rPr sz="900">
                           <a:latin typeface="Segoe UI"/>
                         </a:rPr>
-                        <a:t>Fleet Bound Premium: $598,533.06</a:t>
+                        <a:t>Fleet Bound Premium: $638,544.48</a:t>
                       </a:r>
                     </a:p>
                   </a:txBody>
@@ -3727,7 +3727,7 @@
                         <a:rPr sz="900">
                           <a:latin typeface="Segoe UI"/>
                         </a:rPr>
-                        <a:t>Fleet Book %: 55.6%</a:t>
+                        <a:t>Fleet Book %: 59.3%</a:t>
                       </a:r>
                     </a:p>
                   </a:txBody>
@@ -3766,7 +3766,7 @@
                         <a:rPr sz="900">
                           <a:latin typeface="Segoe UI"/>
                         </a:rPr>
-                        <a:t>Non-Fleet Subs: 118  |  Binds: 15</a:t>
+                        <a:t>Non-Fleet Subs: 118  |  Binds: 14</a:t>
                       </a:r>
                     </a:p>
                   </a:txBody>
@@ -3803,7 +3803,7 @@
                         <a:rPr sz="900">
                           <a:latin typeface="Segoe UI"/>
                         </a:rPr>
-                        <a:t>Non-Fleet Bound Premium: $478,152.63</a:t>
+                        <a:t>Non-Fleet Bound Premium: $438,141.21</a:t>
                       </a:r>
                     </a:p>
                   </a:txBody>
@@ -3840,7 +3840,7 @@
                         <a:rPr sz="900">
                           <a:latin typeface="Segoe UI"/>
                         </a:rPr>
-                        <a:t>Non-Fleet Book %: 44.4%</a:t>
+                        <a:t>Non-Fleet Book %: 40.7%</a:t>
                       </a:r>
                     </a:p>
                   </a:txBody>
@@ -4428,7 +4428,7 @@
                           </a:solidFill>
                           <a:latin typeface="Segoe UI"/>
                         </a:rPr>
-                        <a:t>35</a:t>
+                        <a:t>36</a:t>
                       </a:r>
                     </a:p>
                   </a:txBody>
@@ -4707,7 +4707,7 @@
                           </a:solidFill>
                           <a:latin typeface="Segoe UI"/>
                         </a:rPr>
-                        <a:t>17.1%</a:t>
+                        <a:t>13.9%</a:t>
                       </a:r>
                     </a:p>
                   </a:txBody>
@@ -4983,7 +4983,7 @@
                           </a:solidFill>
                           <a:latin typeface="Segoe UI"/>
                         </a:rPr>
-                        <a:t>6</a:t>
+                        <a:t>5</a:t>
                       </a:r>
                     </a:p>
                   </a:txBody>

--- a/generated/Tier 1 Broker Scorecards/Roadways Commercial Insurance Services Inc_Broker_Scorecard.pptx
+++ b/generated/Tier 1 Broker Scorecards/Roadways Commercial Insurance Services Inc_Broker_Scorecard.pptx
@@ -3394,7 +3394,7 @@
                         <a:rPr sz="900">
                           <a:latin typeface="Segoe UI"/>
                         </a:rPr>
-                        <a:t>Tier 1  |  13.87% / 15.00%</a:t>
+                        <a:t>Tier 1  |  13.77% / 15.00%</a:t>
                       </a:r>
                     </a:p>
                   </a:txBody>
@@ -3766,7 +3766,7 @@
                         <a:rPr sz="900">
                           <a:latin typeface="Segoe UI"/>
                         </a:rPr>
-                        <a:t>Non-Fleet Subs: 118  |  Binds: 14</a:t>
+                        <a:t>Non-Fleet Subs: 119  |  Binds: 14</a:t>
                       </a:r>
                     </a:p>
                   </a:txBody>
@@ -4428,7 +4428,7 @@
                           </a:solidFill>
                           <a:latin typeface="Segoe UI"/>
                         </a:rPr>
-                        <a:t>36</a:t>
+                        <a:t>37</a:t>
                       </a:r>
                     </a:p>
                   </a:txBody>
@@ -4581,7 +4581,7 @@
                         <a:rPr sz="800">
                           <a:latin typeface="Segoe UI"/>
                         </a:rPr>
-                        <a:t>19.0%</a:t>
+                        <a:t>16.7%</a:t>
                       </a:r>
                     </a:p>
                   </a:txBody>
@@ -4707,7 +4707,7 @@
                           </a:solidFill>
                           <a:latin typeface="Segoe UI"/>
                         </a:rPr>
-                        <a:t>13.9%</a:t>
+                        <a:t>13.5%</a:t>
                       </a:r>
                     </a:p>
                   </a:txBody>
@@ -4866,7 +4866,7 @@
                         <a:rPr sz="800">
                           <a:latin typeface="Segoe UI"/>
                         </a:rPr>
-                        <a:t>8</a:t>
+                        <a:t>7</a:t>
                       </a:r>
                     </a:p>
                   </a:txBody>

--- a/generated/Tier 1 Broker Scorecards/Roadways Commercial Insurance Services Inc_Broker_Scorecard.pptx
+++ b/generated/Tier 1 Broker Scorecards/Roadways Commercial Insurance Services Inc_Broker_Scorecard.pptx
@@ -4581,7 +4581,7 @@
                         <a:rPr sz="800">
                           <a:latin typeface="Segoe UI"/>
                         </a:rPr>
-                        <a:t>16.7%</a:t>
+                        <a:t>19.0%</a:t>
                       </a:r>
                     </a:p>
                   </a:txBody>
@@ -4866,7 +4866,7 @@
                         <a:rPr sz="800">
                           <a:latin typeface="Segoe UI"/>
                         </a:rPr>
-                        <a:t>7</a:t>
+                        <a:t>8</a:t>
                       </a:r>
                     </a:p>
                   </a:txBody>

--- a/generated/Tier 1 Broker Scorecards/Roadways Commercial Insurance Services Inc_Broker_Scorecard.pptx
+++ b/generated/Tier 1 Broker Scorecards/Roadways Commercial Insurance Services Inc_Broker_Scorecard.pptx
@@ -3357,7 +3357,7 @@
                         <a:rPr sz="800">
                           <a:latin typeface="Segoe UI"/>
                         </a:rPr>
-                        <a:t>$737,615.70 / $1,828,168.12 / $1,076,685.69</a:t>
+                        <a:t>$737,615.70 / $1,825,890.36 / $1,076,685.69</a:t>
                       </a:r>
                     </a:p>
                   </a:txBody>
@@ -4581,7 +4581,7 @@
                         <a:rPr sz="800">
                           <a:latin typeface="Segoe UI"/>
                         </a:rPr>
-                        <a:t>19.0%</a:t>
+                        <a:t>16.7%</a:t>
                       </a:r>
                     </a:p>
                   </a:txBody>
@@ -4866,7 +4866,7 @@
                         <a:rPr sz="800">
                           <a:latin typeface="Segoe UI"/>
                         </a:rPr>
-                        <a:t>8</a:t>
+                        <a:t>7</a:t>
                       </a:r>
                     </a:p>
                   </a:txBody>
